--- a/curriculum/M01/W01/L02/slides-2.pptx
+++ b/curriculum/M01/W01/L02/slides-2.pptx
@@ -12114,11 +12114,40 @@
                 <a:ea typeface="Malgun Gothic"/>
                 <a:cs typeface="Malgun Gothic"/>
               </a:rPr>
-              <a:t>: 말초 화학수용체가 저산소를 감지해 환기가 늘어난다. 그런데 환기가 늘면 CO₂가 씻겨 나가 호흡성 알칼리증이 생기고, 이것이 중추 화학수용체를 통해 환기를 다시 억제한다. 그래서 초기 환기 증가는 제한적이다. 2. </a:t>
-            </a:r>
+              <a:t>: 말초 화학수용체가 저산소를 감지해 환기가 늘어난다. 그런데 환기가 늘면 CO₂가 씻겨 나가 호흡성 알칼리증이 생기고, 이것이 중추 화학수용체를 통해 환기를 다시 억제한다. 그래서 초기 환기 증가는 제한적이다.</a:t>
+            </a:r>
+          </a:p>
+          <a:p>
+            <a:pPr>
+              <a:spcAft>
+                <a:spcPts val="900"/>
+              </a:spcAft>
+            </a:pPr>
             <a:r>
               <a:rPr sz="1400" b="1" i="0">
                 <a:solidFill>
+                  <a:srgbClr val="F2B705"/>
+                </a:solidFill>
+                <a:latin typeface="Malgun Gothic"/>
+                <a:ea typeface="Malgun Gothic"/>
+                <a:cs typeface="Malgun Gothic"/>
+              </a:rPr>
+              <a:t>•  </a:t>
+            </a:r>
+            <a:r>
+              <a:rPr sz="1400" b="0" i="0">
+                <a:solidFill>
+                  <a:srgbClr val="11202B"/>
+                </a:solidFill>
+                <a:latin typeface="Malgun Gothic"/>
+                <a:ea typeface="Malgun Gothic"/>
+                <a:cs typeface="Malgun Gothic"/>
+              </a:rPr>
+              <a:t>2. </a:t>
+            </a:r>
+            <a:r>
+              <a:rPr sz="1400" b="1" i="0">
+                <a:solidFill>
                   <a:srgbClr val="11202B"/>
                 </a:solidFill>
                 <a:latin typeface="Malgun Gothic"/>
@@ -12136,7 +12165,36 @@
                 <a:ea typeface="Malgun Gothic"/>
                 <a:cs typeface="Malgun Gothic"/>
               </a:rPr>
-              <a:t>: 신장이 HCO₃⁻를 배설해 pH를 되돌린다. 알칼리증이 교정되면서 환기 억제가 풀려 환기가 더 늘어난다. 고산병 예방에 쓰는 acetazolamide가 carbonic anhydrase를 억제해 HCO₃⁻ 배설을 앞당기는 것이 이 단계를 가속하는 것이다. 3. </a:t>
+              <a:t>: 신장이 HCO₃⁻를 배설해 pH를 되돌린다. 알칼리증이 교정되면서 환기 억제가 풀려 환기가 더 늘어난다. 고산병 예방에 쓰는 acetazolamide가 carbonic anhydrase를 억제해 HCO₃⁻ 배설을 앞당기는 것이 이 단계를 가속하는 것이다.</a:t>
+            </a:r>
+          </a:p>
+          <a:p>
+            <a:pPr>
+              <a:spcAft>
+                <a:spcPts val="900"/>
+              </a:spcAft>
+            </a:pPr>
+            <a:r>
+              <a:rPr sz="1400" b="1" i="0">
+                <a:solidFill>
+                  <a:srgbClr val="F2B705"/>
+                </a:solidFill>
+                <a:latin typeface="Malgun Gothic"/>
+                <a:ea typeface="Malgun Gothic"/>
+                <a:cs typeface="Malgun Gothic"/>
+              </a:rPr>
+              <a:t>•  </a:t>
+            </a:r>
+            <a:r>
+              <a:rPr sz="1400" b="0" i="0">
+                <a:solidFill>
+                  <a:srgbClr val="11202B"/>
+                </a:solidFill>
+                <a:latin typeface="Malgun Gothic"/>
+                <a:ea typeface="Malgun Gothic"/>
+                <a:cs typeface="Malgun Gothic"/>
+              </a:rPr>
+              <a:t>3. </a:t>
             </a:r>
             <a:r>
               <a:rPr sz="1400" b="1" i="0">

--- a/curriculum/M01/W01/L02/slides-2.pptx
+++ b/curriculum/M01/W01/L02/slides-2.pptx
@@ -15530,7 +15530,7 @@
                 <a:ea typeface="Malgun Gothic"/>
                 <a:cs typeface="Malgun Gothic"/>
               </a:rPr>
-              <a:t>M01-W01-L01 순환계 요약 — 폐순환, 모세혈관 교환, 혈류와 압력</a:t>
+              <a:t>M01-W01-L01 순환계 요약: 심장·혈관·혈류와 항상성 — 폐순환, 모세혈관 교환, 혈류와 압력</a:t>
             </a:r>
           </a:p>
           <a:p>
